--- a/preaching/提摩太前書二章1-8節_為萬人禱告.pptx
+++ b/preaching/提摩太前書二章1-8節_為萬人禱告.pptx
@@ -8735,7 +8735,7 @@
                 <a:ea typeface="Calibri" pitchFamily="34" charset="-122"/>
                 <a:cs typeface="Calibri" pitchFamily="34" charset="-120"/>
               </a:rPr>
-              <a:t>「舉起聖潔的手，無忿怒、無爭論，隨處禱告。」</a:t>
+              <a:t>「我願男人無忿怒，無爭論，舉起聖潔的手，隨處禱告。」</a:t>
             </a:r>
             <a:endParaRPr lang="en-US" sz="2200" dirty="0"/>
           </a:p>
@@ -10692,7 +10692,7 @@
                 <a:ea typeface="Calibri" pitchFamily="34" charset="-122"/>
                 <a:cs typeface="Calibri" pitchFamily="34" charset="-120"/>
               </a:rPr>
-              <a:t>懇求、禱告、代求、謝恩；</a:t>
+              <a:t>懇求、禱告、代求、祝謝；</a:t>
             </a:r>
             <a:endParaRPr lang="en-US" sz="2000" dirty="0"/>
           </a:p>
@@ -10751,7 +10751,7 @@
                 <a:ea typeface="Calibri" pitchFamily="34" charset="-122"/>
                 <a:cs typeface="Calibri" pitchFamily="34" charset="-120"/>
               </a:rPr>
-              <a:t>為王為</a:t>
+              <a:t>為君王和</a:t>
             </a:r>
             <a:pPr indent="0" marL="0">
               <a:lnSpc>
@@ -10768,7 +10768,7 @@
                 <a:ea typeface="Calibri" pitchFamily="34" charset="-122"/>
                 <a:cs typeface="Calibri" pitchFamily="34" charset="-120"/>
               </a:rPr>
-              <a:t>一切在位的</a:t>
+              <a:t>一切在位的，</a:t>
             </a:r>
             <a:pPr indent="0" marL="0">
               <a:lnSpc>
@@ -10785,7 +10785,7 @@
                 <a:ea typeface="Calibri" pitchFamily="34" charset="-122"/>
                 <a:cs typeface="Calibri" pitchFamily="34" charset="-120"/>
               </a:rPr>
-              <a:t>也要如此，使我們可以敬虔、端正、平安無事地度日。</a:t>
+              <a:t>也該如此，使我們可以敬虔、端正、平安無事的度日。</a:t>
             </a:r>
             <a:endParaRPr lang="en-US" sz="2000" dirty="0"/>
           </a:p>
@@ -14914,7 +14914,7 @@
                 <a:ea typeface="Calibri" pitchFamily="34" charset="-122"/>
                 <a:cs typeface="Calibri" pitchFamily="34" charset="-120"/>
               </a:rPr>
-              <a:t>我為此奉派，作傳道的，作使徒……作外邦人的師傅，教導他們相信，學習真道。</a:t>
+              <a:t>我為此奉派作傳道的，作使徒……作外邦人的師傅，教導他們相信，學習真道。</a:t>
             </a:r>
             <a:endParaRPr lang="en-US" sz="2000" dirty="0"/>
           </a:p>
@@ -14973,7 +14973,7 @@
                 <a:ea typeface="Calibri" pitchFamily="34" charset="-122"/>
                 <a:cs typeface="Calibri" pitchFamily="34" charset="-120"/>
               </a:rPr>
-              <a:t>我願男人無忿怒、無爭論，舉起</a:t>
+              <a:t>我願男人無忿怒，無爭論，舉起</a:t>
             </a:r>
             <a:pPr indent="0" marL="0">
               <a:lnSpc>
@@ -18328,7 +18328,7 @@
                 <a:ea typeface="Calibri" pitchFamily="34" charset="-122"/>
                 <a:cs typeface="Calibri" pitchFamily="34" charset="-120"/>
               </a:rPr>
-              <a:t>「我勸你，第一要為萬人懇求、禱告、代求、謝恩。」</a:t>
+              <a:t>「我勸你，第一要為萬人懇求、禱告、代求、祝謝。」</a:t>
             </a:r>
             <a:endParaRPr lang="en-US" sz="2200" dirty="0"/>
           </a:p>
